--- a/dossiers/Aditya_Mehra_Career_Pitch_Deck.pptx
+++ b/dossiers/Aditya_Mehra_Career_Pitch_Deck.pptx
@@ -3164,7 +3164,7 @@
               </a:defRPr>
             </a:pPr>
             <a:r>
-              <a:t>Dayananda Sagar University '26  |  Bengaluru, India  |  ashishiash007@gmail.com</a:t>
+              <a:t>Dayananda Sagar University '26  |  Bengaluru, India  |  adityamehra799@gmail.com</a:t>
             </a:r>
           </a:p>
         </p:txBody>
